--- a/lecture_pptx/out/work02_teacher.pptx
+++ b/lecture_pptx/out/work02_teacher.pptx
@@ -1106,7 +1106,7 @@
                 <a:ea typeface="Yu Gothic UI Semibold" pitchFamily="34" charset="-122"/>
                 <a:cs typeface="Yu Gothic UI Semibold" pitchFamily="34" charset="-120"/>
               </a:rPr>
-              <a:t>LP → 公式LINE 連携を本番運用へ</a:t>
+              <a:t>リッチメニュー + アイコン画像の制作</a:t>
             </a:r>
             <a:endParaRPr lang="en-US" sz="3400" dirty="0"/>
           </a:p>
@@ -1145,7 +1145,7 @@
                 <a:ea typeface="Yu Gothic UI" pitchFamily="34" charset="-122"/>
                 <a:cs typeface="Yu Gothic UI" pitchFamily="34" charset="-120"/>
               </a:rPr>
-              <a:t>AIDMA を回して、登録率と予約率を数字で改善する</a:t>
+              <a:t>公式LINE の「見た目」を AI で仕上げ、次回そのまま設定できる素材を完成</a:t>
             </a:r>
             <a:endParaRPr lang="en-US" sz="1600" dirty="0"/>
           </a:p>
@@ -1275,7 +1275,7 @@
                 <a:ea typeface="Yu Gothic UI Semibold" pitchFamily="34" charset="-122"/>
                 <a:cs typeface="Yu Gothic UI Semibold" pitchFamily="34" charset="-120"/>
               </a:rPr>
-              <a:t>演習1 LP の効果を AI で分析 — 解答・指導ポイント</a:t>
+              <a:t>演習1 リッチメニューを AI で作成 — 解答・指導ポイント</a:t>
             </a:r>
             <a:endParaRPr lang="en-US" sz="2200" dirty="0"/>
           </a:p>
@@ -1462,7 +1462,7 @@
                 <a:ea typeface="Yu Gothic UI" pitchFamily="34" charset="-122"/>
                 <a:cs typeface="Yu Gothic UI" pitchFamily="34" charset="-120"/>
               </a:rPr>
-              <a:t>以下は私のLP(URL: ●●●)のアクセスデータです(過去2週間)。</a:t>
+              <a:t>公式LINE のリッチメニュー(6分割)用の画像案を作ってください。</a:t>
             </a:r>
             <a:endParaRPr lang="en-US" sz="1150" dirty="0"/>
           </a:p>
@@ -1482,7 +1482,7 @@
                 <a:ea typeface="Yu Gothic UI" pitchFamily="34" charset="-122"/>
                 <a:cs typeface="Yu Gothic UI" pitchFamily="34" charset="-120"/>
               </a:rPr>
-              <a:t>私の目的は「来週試す改善1点を決める」ことです。</a:t>
+              <a:t>LP のメインカラーは ●●●、トーンは「信頼感+親しみ」。</a:t>
             </a:r>
             <a:endParaRPr lang="en-US" sz="1150" dirty="0"/>
           </a:p>
@@ -1502,7 +1502,7 @@
                 <a:ea typeface="Yu Gothic UI" pitchFamily="34" charset="-122"/>
                 <a:cs typeface="Yu Gothic UI" pitchFamily="34" charset="-120"/>
               </a:rPr>
-              <a:t>次の観点で分析してください。</a:t>
+              <a:t>配置: 上段「予約/相談/資料」、下段「お客様の声/プロフィール/お知らせ」。</a:t>
             </a:r>
             <a:endParaRPr lang="en-US" sz="1150" dirty="0"/>
           </a:p>
@@ -1522,7 +1522,7 @@
                 <a:ea typeface="Yu Gothic UI" pitchFamily="34" charset="-122"/>
                 <a:cs typeface="Yu Gothic UI" pitchFamily="34" charset="-120"/>
               </a:rPr>
-              <a:t>  - CVR と離脱ポイント</a:t>
+              <a:t>文字は最小限(各3文字以内)、アイコン中心、角丸(R=12px)で。</a:t>
             </a:r>
             <a:endParaRPr lang="en-US" sz="1150" dirty="0"/>
           </a:p>
@@ -1542,47 +1542,7 @@
                 <a:ea typeface="Yu Gothic UI" pitchFamily="34" charset="-122"/>
                 <a:cs typeface="Yu Gothic UI" pitchFamily="34" charset="-120"/>
               </a:rPr>
-              <a:t>  - 改善案を優先度(高/中/低)で5つ</a:t>
-            </a:r>
-            <a:endParaRPr lang="en-US" sz="1150" dirty="0"/>
-          </a:p>
-          <a:p>
-            <a:pPr indent="0" marL="0">
-              <a:spcAft>
-                <a:spcPts val="400"/>
-              </a:spcAft>
-              <a:buNone/>
-            </a:pPr>
-            <a:r>
-              <a:rPr lang="en-US" sz="1150" dirty="0">
-                <a:solidFill>
-                  <a:srgbClr val="1A1A1A"/>
-                </a:solidFill>
-                <a:latin typeface="Yu Gothic UI" pitchFamily="34" charset="0"/>
-                <a:ea typeface="Yu Gothic UI" pitchFamily="34" charset="-122"/>
-                <a:cs typeface="Yu Gothic UI" pitchFamily="34" charset="-120"/>
-              </a:rPr>
-              <a:t>  - 各改善案は「変更する箇所」「変更後の文言/レイアウト」を含めて</a:t>
-            </a:r>
-            <a:endParaRPr lang="en-US" sz="1150" dirty="0"/>
-          </a:p>
-          <a:p>
-            <a:pPr indent="0" marL="0">
-              <a:spcAft>
-                <a:spcPts val="400"/>
-              </a:spcAft>
-              <a:buNone/>
-            </a:pPr>
-            <a:r>
-              <a:rPr lang="en-US" sz="1150" dirty="0">
-                <a:solidFill>
-                  <a:srgbClr val="1A1A1A"/>
-                </a:solidFill>
-                <a:latin typeface="Yu Gothic UI" pitchFamily="34" charset="0"/>
-                <a:ea typeface="Yu Gothic UI" pitchFamily="34" charset="-122"/>
-                <a:cs typeface="Yu Gothic UI" pitchFamily="34" charset="-120"/>
-              </a:rPr>
-              <a:t>【データ】(以下に貼る)</a:t>
+              <a:t>サイズは 2500×1686 PNG。</a:t>
             </a:r>
             <a:endParaRPr lang="en-US" sz="1150" dirty="0"/>
           </a:p>
@@ -1710,7 +1670,7 @@
                 <a:ea typeface="Yu Gothic UI" pitchFamily="34" charset="-122"/>
                 <a:cs typeface="Yu Gothic UI" pitchFamily="34" charset="-120"/>
               </a:rPr>
-              <a:t>・現状診断: CVR ●%、離脱は「FV→次セクション」で6割</a:t>
+              <a:t>・6分割リッチメニュー画像(2500×1686 PNG)</a:t>
             </a:r>
             <a:endParaRPr lang="en-US" sz="1150" dirty="0"/>
           </a:p>
@@ -1730,7 +1690,7 @@
                 <a:ea typeface="Yu Gothic UI" pitchFamily="34" charset="-122"/>
                 <a:cs typeface="Yu Gothic UI" pitchFamily="34" charset="-120"/>
               </a:rPr>
-              <a:t>・改善案5件(高=2件、中=2件、低=1件)、各案にビフォー/アフター文言付き</a:t>
+              <a:t>・タップ領域マッピング表(座標と遷移先URL)</a:t>
             </a:r>
             <a:endParaRPr lang="en-US" sz="1150" dirty="0"/>
           </a:p>
@@ -1750,7 +1710,7 @@
                 <a:ea typeface="Yu Gothic UI" pitchFamily="34" charset="-122"/>
                 <a:cs typeface="Yu Gothic UI" pitchFamily="34" charset="-120"/>
               </a:rPr>
-              <a:t>・今週試す1点: ヒーローのキャッチを共感型に変更</a:t>
+              <a:t>・テスト配信用シナリオ(タップ→遷移先メッセージの想定文)</a:t>
             </a:r>
             <a:endParaRPr lang="en-US" sz="1150" dirty="0"/>
           </a:p>
@@ -1878,7 +1838,7 @@
                 <a:ea typeface="Yu Gothic UI" pitchFamily="34" charset="-122"/>
                 <a:cs typeface="Yu Gothic UI" pitchFamily="34" charset="-120"/>
               </a:rPr>
-              <a:t>・「データだけ貼って分析して」と言いがち。必ず "私が知りたいことは" を一文で言わせる。</a:t>
+              <a:t>・初回生成は文字が多すぎることが多い。「文字は3文字以内/タップ」と再依頼させる。</a:t>
             </a:r>
             <a:endParaRPr lang="en-US" sz="1150" dirty="0"/>
           </a:p>
@@ -1898,7 +1858,7 @@
                 <a:ea typeface="Yu Gothic UI" pitchFamily="34" charset="-122"/>
                 <a:cs typeface="Yu Gothic UI" pitchFamily="34" charset="-120"/>
               </a:rPr>
-              <a:t>・改善案が「全部やる」になりやすい。「1週間で1点」を強制すると行動が起きる。</a:t>
+              <a:t>・タップ領域の座標ズレに注意。次回の設定で LINE Official Account Manager の座標と合うか確認。</a:t>
             </a:r>
             <a:endParaRPr lang="en-US" sz="1150" dirty="0"/>
           </a:p>
@@ -1918,7 +1878,7 @@
                 <a:ea typeface="Yu Gothic UI" pitchFamily="34" charset="-122"/>
                 <a:cs typeface="Yu Gothic UI" pitchFamily="34" charset="-120"/>
               </a:rPr>
-              <a:t>・数字より「文言の手触り」で判断する生徒は、声に出して読ませると気づきが出る。</a:t>
+              <a:t>・「とりあえず1枚」で完成形にしないと次回に持ち越せない。「今日中の完成」をゴールに。</a:t>
             </a:r>
             <a:endParaRPr lang="en-US" sz="1150" dirty="0"/>
           </a:p>
@@ -2009,7 +1969,7 @@
                 <a:ea typeface="Yu Gothic UI Semibold" pitchFamily="34" charset="-122"/>
                 <a:cs typeface="Yu Gothic UI Semibold" pitchFamily="34" charset="-120"/>
               </a:rPr>
-              <a:t>演習2 リッチメニュー+導線完成 — 解答・指導ポイント</a:t>
+              <a:t>演習2 アイコン画像の作成または検索 — 解答・指導ポイント</a:t>
             </a:r>
             <a:endParaRPr lang="en-US" sz="2200" dirty="0"/>
           </a:p>
@@ -2196,7 +2156,7 @@
                 <a:ea typeface="Yu Gothic UI" pitchFamily="34" charset="-122"/>
                 <a:cs typeface="Yu Gothic UI" pitchFamily="34" charset="-120"/>
               </a:rPr>
-              <a:t>公式LINE のリッチメニュー(6分割)用の画像案を作ってください。</a:t>
+              <a:t>保険プランナーの公式LINE アイコン画像を5パターン作ってください。</a:t>
             </a:r>
             <a:endParaRPr lang="en-US" sz="1150" dirty="0"/>
           </a:p>
@@ -2216,7 +2176,7 @@
                 <a:ea typeface="Yu Gothic UI" pitchFamily="34" charset="-122"/>
                 <a:cs typeface="Yu Gothic UI" pitchFamily="34" charset="-120"/>
               </a:rPr>
-              <a:t>LP のメインカラーは ●●●、トーンは「信頼感+親しみ」。</a:t>
+              <a:t>ターゲット: 30代共働き世帯。トーン: 信頼感+親しみ。</a:t>
             </a:r>
             <a:endParaRPr lang="en-US" sz="1150" dirty="0"/>
           </a:p>
@@ -2236,7 +2196,7 @@
                 <a:ea typeface="Yu Gothic UI" pitchFamily="34" charset="-122"/>
                 <a:cs typeface="Yu Gothic UI" pitchFamily="34" charset="-120"/>
               </a:rPr>
-              <a:t>配置: 上段「予約/相談/資料」、下段「お客様の声/プロフィール/お知らせ」。</a:t>
+              <a:t>私の3軸: ●●●(立ち位置を貼る)</a:t>
             </a:r>
             <a:endParaRPr lang="en-US" sz="1150" dirty="0"/>
           </a:p>
@@ -2256,7 +2216,7 @@
                 <a:ea typeface="Yu Gothic UI" pitchFamily="34" charset="-122"/>
                 <a:cs typeface="Yu Gothic UI" pitchFamily="34" charset="-120"/>
               </a:rPr>
-              <a:t>文字は最小限、アイコン中心、丸み(角丸 R=12px)で。</a:t>
+              <a:t>サイズ: 640×640 PNG、背景は明るい単色 or グラデ。</a:t>
             </a:r>
             <a:endParaRPr lang="en-US" sz="1150" dirty="0"/>
           </a:p>
@@ -2384,7 +2344,7 @@
                 <a:ea typeface="Yu Gothic UI" pitchFamily="34" charset="-122"/>
                 <a:cs typeface="Yu Gothic UI" pitchFamily="34" charset="-120"/>
               </a:rPr>
-              <a:t>・6分割リッチメニュー画像(2500×1686 推奨)</a:t>
+              <a:t>・候補アイコン5パターン(640×640 PNG)</a:t>
             </a:r>
             <a:endParaRPr lang="en-US" sz="1150" dirty="0"/>
           </a:p>
@@ -2404,27 +2364,7 @@
                 <a:ea typeface="Yu Gothic UI" pitchFamily="34" charset="-122"/>
                 <a:cs typeface="Yu Gothic UI" pitchFamily="34" charset="-120"/>
               </a:rPr>
-              <a:t>・タップ領域マッピング表(座標と遷移先URL)</a:t>
-            </a:r>
-            <a:endParaRPr lang="en-US" sz="1150" dirty="0"/>
-          </a:p>
-          <a:p>
-            <a:pPr indent="0" marL="0">
-              <a:spcAft>
-                <a:spcPts val="400"/>
-              </a:spcAft>
-              <a:buNone/>
-            </a:pPr>
-            <a:r>
-              <a:rPr lang="en-US" sz="1150" dirty="0">
-                <a:solidFill>
-                  <a:srgbClr val="1A1A1A"/>
-                </a:solidFill>
-                <a:latin typeface="Yu Gothic UI" pitchFamily="34" charset="0"/>
-                <a:ea typeface="Yu Gothic UI" pitchFamily="34" charset="-122"/>
-                <a:cs typeface="Yu Gothic UI" pitchFamily="34" charset="-120"/>
-              </a:rPr>
-              <a:t>・テスト配信用シナリオ(タップ→遷移先メッセージの想定文)</a:t>
+              <a:t>・各パターンの「ターゲットがどう感じるか」コメント</a:t>
             </a:r>
             <a:endParaRPr lang="en-US" sz="1150" dirty="0"/>
           </a:p>
@@ -2552,7 +2492,7 @@
                 <a:ea typeface="Yu Gothic UI" pitchFamily="34" charset="-122"/>
                 <a:cs typeface="Yu Gothic UI" pitchFamily="34" charset="-120"/>
               </a:rPr>
-              <a:t>・初回生成は文字が多すぎることが多い。「文字は3文字以内/タップ」と再依頼させる。</a:t>
+              <a:t>・「人物写真」が一番効くケースが多いと事前に伝える。AI 一辺倒にならないよう注意。</a:t>
             </a:r>
             <a:endParaRPr lang="en-US" sz="1150" dirty="0"/>
           </a:p>
@@ -2572,7 +2512,7 @@
                 <a:ea typeface="Yu Gothic UI" pitchFamily="34" charset="-122"/>
                 <a:cs typeface="Yu Gothic UI" pitchFamily="34" charset="-120"/>
               </a:rPr>
-              <a:t>・タップ領域の座標ズレに注意。LINE 公式アカウントマネージャでプレビュー必須。</a:t>
+              <a:t>・アイコン候補が増えると決められなくなる。「直感で3秒で選ぶ」ルールを徹底。</a:t>
             </a:r>
             <a:endParaRPr lang="en-US" sz="1150" dirty="0"/>
           </a:p>
@@ -2592,7 +2532,7 @@
                 <a:ea typeface="Yu Gothic UI" pitchFamily="34" charset="-122"/>
                 <a:cs typeface="Yu Gothic UI" pitchFamily="34" charset="-120"/>
               </a:rPr>
-              <a:t>・「リッチメニュー作って終わり」になりがち。テスト配信→1往復するまでが課題。</a:t>
+              <a:t>・ストックフォト利用時は「ライセンス保存」を忘れさせない。利用規約のスクショ必須。</a:t>
             </a:r>
             <a:endParaRPr lang="en-US" sz="1150" dirty="0"/>
           </a:p>
